--- a/Docs/submission-deck.pptx
+++ b/Docs/submission-deck.pptx
@@ -644,7 +644,7 @@
           <a:lstStyle/>
           <a:p>
             <a:r>
-              <a:t>Uses the six content slides and heading/pointer structure from Raw/provided-template.pptx; retained supplied logos are template assets, not endorsement. The user supplied a 2025 reference. Its 2026 organizer applicability and registered team ID/name still require confirmation. Sightline is a working project name. Sources: https://www.sih.gov.in/sih2026PS; Benchmarks/results/prototype-v01-browser.json; Benchmarks/results/prototype-unit-tests.txt</a:t>
+              <a:t>Uses the six content slides and heading/pointer structure from Raw/provided-template.pptx; retained supplied logos are template assets, not endorsement. The user supplied a 2025 reference. Its 2026 organizer applicability and registered team ID/name still require confirmation. Sightline is a working project name. Sources: https://www.sih.gov.in/sih2026PS; Benchmarks/results/operations-v01/summary.json; Benchmarks/results/operations-v01/face-scale-v01.json; Benchmarks/results/webpii-text-v01-summary.json; Benchmarks/results/prototype-unit-tests.txt</a:t>
             </a:r>
           </a:p>
         </p:txBody>
@@ -758,7 +758,7 @@
           <a:lstStyle/>
           <a:p>
             <a:r>
-              <a:t>Uses the six content slides and heading/pointer structure from Raw/provided-template.pptx; retained supplied logos are template assets, not endorsement. The user supplied a 2025 reference. Its 2026 organizer applicability and registered team ID/name still require confirmation. Sightline is a working project name. Sources: https://www.sih.gov.in/sih2026PS; Benchmarks/results/prototype-v01-browser.json; Benchmarks/results/prototype-unit-tests.txt</a:t>
+              <a:t>Uses the six content slides and heading/pointer structure from Raw/provided-template.pptx; retained supplied logos are template assets, not endorsement. The user supplied a 2025 reference. Its 2026 organizer applicability and registered team ID/name still require confirmation. Sightline is a working project name. Sources: https://www.sih.gov.in/sih2026PS; Benchmarks/results/operations-v01/summary.json; Benchmarks/results/operations-v01/face-scale-v01.json; Benchmarks/results/webpii-text-v01-summary.json; Benchmarks/results/prototype-unit-tests.txt</a:t>
             </a:r>
           </a:p>
         </p:txBody>
@@ -872,7 +872,7 @@
           <a:lstStyle/>
           <a:p>
             <a:r>
-              <a:t>Uses the six content slides and heading/pointer structure from Raw/provided-template.pptx; retained supplied logos are template assets, not endorsement. The user supplied a 2025 reference. Its 2026 organizer applicability and registered team ID/name still require confirmation. Sightline is a working project name. Sources: https://www.sih.gov.in/sih2026PS; Benchmarks/results/prototype-v01-browser.json; Benchmarks/results/prototype-unit-tests.txt</a:t>
+              <a:t>Uses the six content slides and heading/pointer structure from Raw/provided-template.pptx; retained supplied logos are template assets, not endorsement. The user supplied a 2025 reference. Its 2026 organizer applicability and registered team ID/name still require confirmation. Sightline is a working project name. Sources: https://www.sih.gov.in/sih2026PS; Benchmarks/results/operations-v01/summary.json; Benchmarks/results/operations-v01/face-scale-v01.json; Benchmarks/results/webpii-text-v01-summary.json; Benchmarks/results/prototype-unit-tests.txt</a:t>
             </a:r>
           </a:p>
         </p:txBody>
@@ -1045,7 +1045,7 @@
           <a:lstStyle/>
           <a:p>
             <a:r>
-              <a:t>Uses the six content slides and heading/pointer structure from Raw/provided-template.pptx; retained supplied logos are template assets, not endorsement. The user supplied a 2025 reference. Its 2026 organizer applicability and registered team ID/name still require confirmation. Sightline is a working project name. Sources: https://www.sih.gov.in/sih2026PS; Benchmarks/results/prototype-v01-browser.json; Benchmarks/results/prototype-unit-tests.txt</a:t>
+              <a:t>Uses the six content slides and heading/pointer structure from Raw/provided-template.pptx; retained supplied logos are template assets, not endorsement. The user supplied a 2025 reference. Its 2026 organizer applicability and registered team ID/name still require confirmation. Sightline is a working project name. Sources: https://www.sih.gov.in/sih2026PS; Benchmarks/results/operations-v01/summary.json; Benchmarks/results/operations-v01/face-scale-v01.json; Benchmarks/results/webpii-text-v01-summary.json; Benchmarks/results/prototype-unit-tests.txt</a:t>
             </a:r>
           </a:p>
         </p:txBody>
@@ -1218,7 +1218,7 @@
           <a:lstStyle/>
           <a:p>
             <a:r>
-              <a:t>Uses the six content slides and heading/pointer structure from Raw/provided-template.pptx; retained supplied logos are template assets, not endorsement. The user supplied a 2025 reference. Its 2026 organizer applicability and registered team ID/name still require confirmation. Sightline is a working project name. Sources: https://www.sih.gov.in/sih2026PS; Benchmarks/results/prototype-v01-browser.json; Benchmarks/results/prototype-unit-tests.txt</a:t>
+              <a:t>Uses the six content slides and heading/pointer structure from Raw/provided-template.pptx; retained supplied logos are template assets, not endorsement. The user supplied a 2025 reference. Its 2026 organizer applicability and registered team ID/name still require confirmation. Sightline is a working project name. Sources: https://www.sih.gov.in/sih2026PS; Benchmarks/results/operations-v01/summary.json; Benchmarks/results/operations-v01/face-scale-v01.json; Benchmarks/results/webpii-text-v01-summary.json; Benchmarks/results/prototype-unit-tests.txt</a:t>
             </a:r>
           </a:p>
         </p:txBody>
@@ -1371,7 +1371,7 @@
           <a:lstStyle/>
           <a:p>
             <a:r>
-              <a:t>Uses the six content slides and heading/pointer structure from Raw/provided-template.pptx; retained supplied logos are template assets, not endorsement. The user supplied a 2025 reference. Its 2026 organizer applicability and registered team ID/name still require confirmation. Sightline is a working project name. Sources: https://www.sih.gov.in/sih2026PS; Benchmarks/results/prototype-v01-browser.json; Benchmarks/results/prototype-unit-tests.txt</a:t>
+              <a:t>Uses the six content slides and heading/pointer structure from Raw/provided-template.pptx; retained supplied logos are template assets, not endorsement. The user supplied a 2025 reference. Its 2026 organizer applicability and registered team ID/name still require confirmation. Sightline is a working project name. Sources: https://www.sih.gov.in/sih2026PS; Benchmarks/results/operations-v01/summary.json; Benchmarks/results/operations-v01/face-scale-v01.json; Benchmarks/results/webpii-text-v01-summary.json; Benchmarks/results/prototype-unit-tests.txt</a:t>
             </a:r>
           </a:p>
         </p:txBody>
@@ -8300,7 +8300,7 @@
               </a:defRPr>
             </a:pPr>
             <a:r>
-              <a:t>Local browser + Qwen workflow observed; 37 recorded Node tests pass.</a:t>
+              <a:t>Local browser + Qwen workflow observed; 75 recorded Node tests pass.</a:t>
             </a:r>
           </a:p>
           <a:p>
